--- a/esp32-class-projects/02_sessions/slides/1회차_ESP32와_출력장치.pptx
+++ b/esp32-class-projects/02_sessions/slides/1회차_ESP32와_출력장치.pptx
@@ -3272,7 +3272,7 @@
                 <a:ea typeface="Courier New" pitchFamily="34" charset="-122"/>
                 <a:cs typeface="Courier New" pitchFamily="34" charset="-120"/>
               </a:rPr>
-              <a:t>// 주소 0x27 (안 되면 0x3F 시도)</a:t>
+              <a:t>// 고릴라셀 LCD 주소 = 0x20</a:t>
             </a:r>
             <a:endParaRPr lang="en-US" sz="1400" dirty="0"/>
           </a:p>
@@ -3292,7 +3292,7 @@
                 <a:ea typeface="Courier New" pitchFamily="34" charset="-122"/>
                 <a:cs typeface="Courier New" pitchFamily="34" charset="-120"/>
               </a:rPr>
-              <a:t>LiquidCrystal_I2C lcd(0x27, 16, 2);</a:t>
+              <a:t>LiquidCrystal_I2C lcd(0x20, 16, 2);</a:t>
             </a:r>
             <a:endParaRPr lang="en-US" sz="1400" dirty="0"/>
           </a:p>
@@ -3545,7 +3545,7 @@
                 <a:ea typeface="Pretendard" pitchFamily="34" charset="-122"/>
                 <a:cs typeface="Pretendard" pitchFamily="34" charset="-120"/>
               </a:rPr>
-              <a:t>0x27은 LCD의 I2C '주소' — 제품마다 다를 수 있음</a:t>
+              <a:t>고릴라셀 LCD의 I2C 주소는 0x20 (다른 제품이면 0x27·0x3F)</a:t>
             </a:r>
             <a:endParaRPr lang="en-US" sz="1450" dirty="0"/>
           </a:p>
@@ -3669,7 +3669,7 @@
                 <a:ea typeface="Pretendard" pitchFamily="34" charset="-122"/>
                 <a:cs typeface="Pretendard" pitchFamily="34" charset="-120"/>
               </a:rPr>
-              <a:t>글자가 안 보이면? ① 주소를 0x3F로 ② 뒷면 파란 다이얼(대비)을 살짝 조절</a:t>
+              <a:t>글자가 안 보이면? ① 뒷면 파란 다이얼(대비) 조절 ② 다른 제품 LCD면 주소 0x27·0x3F</a:t>
             </a:r>
             <a:endParaRPr lang="en-US" sz="1400" dirty="0"/>
           </a:p>
@@ -5848,7 +5848,7 @@
                 <a:ea typeface="Pretendard" pitchFamily="34" charset="-122"/>
                 <a:cs typeface="Pretendard" pitchFamily="34" charset="-120"/>
               </a:rPr>
-              <a:t>→ ① 주소 0x27 → 0x3F 변경 ② 뒷면 파란 다이얼로 대비 조절 ③ I2C 스캐너 코드(배포)로 실제 주소 확인</a:t>
+              <a:t>→ ① 고릴라셀 LCD 주소가 0x20인지 확인 ② 뒷면 파란 다이얼로 대비 조절 ③ I2C 스캐너 코드로 실제 주소 확인</a:t>
             </a:r>
             <a:endParaRPr lang="en-US" sz="1450" dirty="0"/>
           </a:p>

--- a/esp32-class-projects/02_sessions/slides/1회차_ESP32와_출력장치.pptx
+++ b/esp32-class-projects/02_sessions/slides/1회차_ESP32와_출력장치.pptx
@@ -2519,7 +2519,7 @@
                 <a:ea typeface="Pretendard" pitchFamily="34" charset="-122"/>
                 <a:cs typeface="Pretendard" pitchFamily="34" charset="-120"/>
               </a:rPr>
-              <a:t>내장 LED 깜빡임부터 LCD 글자, 그리고 첫 센서까지 — 오늘 보드와 친구가 돼요</a:t>
+              <a:t>내장 LED 깜빡임부터 7세그 숫자, 그리고 첫 센서까지 — 오늘 보드와 친구가 돼요</a:t>
             </a:r>
             <a:endParaRPr lang="en-US" sz="1600" dirty="0"/>
           </a:p>
@@ -2834,7 +2834,7 @@
                 <a:ea typeface="Pretendard" pitchFamily="34" charset="-122"/>
                 <a:cs typeface="Pretendard" pitchFamily="34" charset="-120"/>
               </a:rPr>
-              <a:t>LCD — 보드가 말을 해요</a:t>
+              <a:t>7세그 — 보드가 숫자로 말해요</a:t>
             </a:r>
             <a:endParaRPr lang="en-US" sz="1400" dirty="0"/>
           </a:p>
@@ -3049,7 +3049,7 @@
                 <a:ea typeface="Pretendard" pitchFamily="34" charset="-122"/>
                 <a:cs typeface="Pretendard" pitchFamily="34" charset="-120"/>
               </a:rPr>
-              <a:t>LCD — 16칸 × 2줄의 작은 화면</a:t>
+              <a:t>7세그먼트 — 4자리 숫자표시기</a:t>
             </a:r>
             <a:endParaRPr lang="en-US" sz="2500" dirty="0"/>
           </a:p>
@@ -3088,7 +3088,7 @@
                 <a:ea typeface="Pretendard" pitchFamily="34" charset="-122"/>
                 <a:cs typeface="Pretendard" pitchFamily="34" charset="-120"/>
               </a:rPr>
-              <a:t>I2C 방식 : 선 2가닥(SDA·SCL)으로 통신 — LCD 셀은 실드의 I2C 포트에</a:t>
+              <a:t>엘리베이터 층수의 그 숫자! 신호 2가닥(DIO·CLK) — 신호 2칸짜리 포트에 통째로</a:t>
             </a:r>
             <a:endParaRPr lang="en-US" sz="1450" dirty="0"/>
           </a:p>
@@ -3252,7 +3252,7 @@
                 <a:ea typeface="Courier New" pitchFamily="34" charset="-122"/>
                 <a:cs typeface="Courier New" pitchFamily="34" charset="-120"/>
               </a:rPr>
-              <a:t>#include &lt;LiquidCrystal_I2C.h&gt;</a:t>
+              <a:t>#include &lt;TM1637Display.h&gt;</a:t>
             </a:r>
             <a:endParaRPr lang="en-US" sz="1400" dirty="0"/>
           </a:p>
@@ -3263,6 +3263,15 @@
               </a:lnSpc>
               <a:buNone/>
             </a:pPr>
+            <a:endParaRPr lang="en-US" sz="1400" dirty="0"/>
+          </a:p>
+          <a:p>
+            <a:pPr indent="0" marL="0">
+              <a:lnSpc>
+                <a:spcPts val="1750"/>
+              </a:lnSpc>
+              <a:buNone/>
+            </a:pPr>
             <a:r>
               <a:rPr lang="en-US" sz="1400" dirty="0">
                 <a:solidFill>
@@ -3272,7 +3281,7 @@
                 <a:ea typeface="Courier New" pitchFamily="34" charset="-122"/>
                 <a:cs typeface="Courier New" pitchFamily="34" charset="-120"/>
               </a:rPr>
-              <a:t>// 고릴라셀 LCD 주소 = 0x20</a:t>
+              <a:t>#define DIO 27  // '6' 칸</a:t>
             </a:r>
             <a:endParaRPr lang="en-US" sz="1400" dirty="0"/>
           </a:p>
@@ -3292,7 +3301,7 @@
                 <a:ea typeface="Courier New" pitchFamily="34" charset="-122"/>
                 <a:cs typeface="Courier New" pitchFamily="34" charset="-120"/>
               </a:rPr>
-              <a:t>LiquidCrystal_I2C lcd(0x20, 16, 2);</a:t>
+              <a:t>#define CLK 14  // '7' 칸</a:t>
             </a:r>
             <a:endParaRPr lang="en-US" sz="1400" dirty="0"/>
           </a:p>
@@ -3321,7 +3330,7 @@
                 <a:ea typeface="Courier New" pitchFamily="34" charset="-122"/>
                 <a:cs typeface="Courier New" pitchFamily="34" charset="-120"/>
               </a:rPr>
-              <a:t>void setup() {</a:t>
+              <a:t>TM1637Display display(CLK, DIO);</a:t>
             </a:r>
             <a:endParaRPr lang="en-US" sz="1400" dirty="0"/>
           </a:p>
@@ -3332,6 +3341,15 @@
               </a:lnSpc>
               <a:buNone/>
             </a:pPr>
+            <a:endParaRPr lang="en-US" sz="1400" dirty="0"/>
+          </a:p>
+          <a:p>
+            <a:pPr indent="0" marL="0">
+              <a:lnSpc>
+                <a:spcPts val="1750"/>
+              </a:lnSpc>
+              <a:buNone/>
+            </a:pPr>
             <a:r>
               <a:rPr lang="en-US" sz="1400" dirty="0">
                 <a:solidFill>
@@ -3341,7 +3359,7 @@
                 <a:ea typeface="Courier New" pitchFamily="34" charset="-122"/>
                 <a:cs typeface="Courier New" pitchFamily="34" charset="-120"/>
               </a:rPr>
-              <a:t>  lcd.init();          // LCD 준비</a:t>
+              <a:t>void setup() {</a:t>
             </a:r>
             <a:endParaRPr lang="en-US" sz="1400" dirty="0"/>
           </a:p>
@@ -3361,7 +3379,7 @@
                 <a:ea typeface="Courier New" pitchFamily="34" charset="-122"/>
                 <a:cs typeface="Courier New" pitchFamily="34" charset="-120"/>
               </a:rPr>
-              <a:t>  lcd.backlight();     // 백라이트</a:t>
+              <a:t>  display.setBrightness(7);</a:t>
             </a:r>
             <a:endParaRPr lang="en-US" sz="1400" dirty="0"/>
           </a:p>
@@ -3381,7 +3399,7 @@
                 <a:ea typeface="Courier New" pitchFamily="34" charset="-122"/>
                 <a:cs typeface="Courier New" pitchFamily="34" charset="-120"/>
               </a:rPr>
-              <a:t>  lcd.setCursor(0, 0); // 0칸, 0줄</a:t>
+              <a:t>  // ★ 우리 팀 번호로!</a:t>
             </a:r>
             <a:endParaRPr lang="en-US" sz="1400" dirty="0"/>
           </a:p>
@@ -3401,47 +3419,7 @@
                 <a:ea typeface="Courier New" pitchFamily="34" charset="-122"/>
                 <a:cs typeface="Courier New" pitchFamily="34" charset="-120"/>
               </a:rPr>
-              <a:t>  lcd.print("Hello Team1!");</a:t>
-            </a:r>
-            <a:endParaRPr lang="en-US" sz="1400" dirty="0"/>
-          </a:p>
-          <a:p>
-            <a:pPr indent="0" marL="0">
-              <a:lnSpc>
-                <a:spcPts val="1750"/>
-              </a:lnSpc>
-              <a:buNone/>
-            </a:pPr>
-            <a:r>
-              <a:rPr lang="en-US" sz="1400" dirty="0">
-                <a:solidFill>
-                  <a:srgbClr val="D9E9FA"/>
-                </a:solidFill>
-                <a:latin typeface="Courier New" pitchFamily="34" charset="0"/>
-                <a:ea typeface="Courier New" pitchFamily="34" charset="-122"/>
-                <a:cs typeface="Courier New" pitchFamily="34" charset="-120"/>
-              </a:rPr>
-              <a:t>  lcd.setCursor(0, 1); // 둘째 줄</a:t>
-            </a:r>
-            <a:endParaRPr lang="en-US" sz="1400" dirty="0"/>
-          </a:p>
-          <a:p>
-            <a:pPr indent="0" marL="0">
-              <a:lnSpc>
-                <a:spcPts val="1750"/>
-              </a:lnSpc>
-              <a:buNone/>
-            </a:pPr>
-            <a:r>
-              <a:rPr lang="en-US" sz="1400" dirty="0">
-                <a:solidFill>
-                  <a:srgbClr val="D9E9FA"/>
-                </a:solidFill>
-                <a:latin typeface="Courier New" pitchFamily="34" charset="0"/>
-                <a:ea typeface="Courier New" pitchFamily="34" charset="-122"/>
-                <a:cs typeface="Courier New" pitchFamily="34" charset="-120"/>
-              </a:rPr>
-              <a:t>  lcd.print("IoT Start!");</a:t>
+              <a:t>  display.showNumberDec(1234);</a:t>
             </a:r>
             <a:endParaRPr lang="en-US" sz="1400" dirty="0"/>
           </a:p>
@@ -3524,7 +3502,7 @@
                 <a:ea typeface="Pretendard" pitchFamily="34" charset="-122"/>
                 <a:cs typeface="Pretendard" pitchFamily="34" charset="-120"/>
               </a:rPr>
-              <a:t>#include = 라이브러리 불러오기 (라이브러리 관리에서 LiquidCrystal I2C 설치)</a:t>
+              <a:t>#include = 라이브러리 불러오기 (라이브러리 관리에서 TM1637 · Avishay Orpaz 설치)</a:t>
             </a:r>
             <a:endParaRPr lang="en-US" sz="1450" dirty="0"/>
           </a:p>
@@ -3545,7 +3523,7 @@
                 <a:ea typeface="Pretendard" pitchFamily="34" charset="-122"/>
                 <a:cs typeface="Pretendard" pitchFamily="34" charset="-120"/>
               </a:rPr>
-              <a:t>고릴라셀 LCD의 I2C 주소는 0x20 (다른 제품이면 0x27·0x3F)</a:t>
+              <a:t>setBrightness(0~7) : 밝기 / showNumberDec(숫자) : 표시 (0~9999)</a:t>
             </a:r>
             <a:endParaRPr lang="en-US" sz="1450" dirty="0"/>
           </a:p>
@@ -3566,7 +3544,7 @@
                 <a:ea typeface="Pretendard" pitchFamily="34" charset="-122"/>
                 <a:cs typeface="Pretendard" pitchFamily="34" charset="-120"/>
               </a:rPr>
-              <a:t>setCursor(칸, 줄)로 위치 지정, print()로 표시</a:t>
+              <a:t>loop가 비어 있어도 표시는 유지돼요</a:t>
             </a:r>
             <a:endParaRPr lang="en-US" sz="1450" dirty="0"/>
           </a:p>
@@ -3587,7 +3565,7 @@
                 <a:ea typeface="Pretendard" pitchFamily="34" charset="-122"/>
                 <a:cs typeface="Pretendard" pitchFamily="34" charset="-120"/>
               </a:rPr>
-              <a:t>loop가 비어 있어도 화면은 유지돼요</a:t>
+              <a:t>showNumberDec(변수) + delay면 '갱신되는 계기판' 완성</a:t>
             </a:r>
             <a:endParaRPr lang="en-US" sz="1450" dirty="0"/>
           </a:p>
@@ -3608,7 +3586,7 @@
                 <a:ea typeface="Pretendard" pitchFamily="34" charset="-122"/>
                 <a:cs typeface="Pretendard" pitchFamily="34" charset="-120"/>
               </a:rPr>
-              <a:t>clear() + print(변수) + delay면 '갱신되는 계기판' 완성</a:t>
+              <a:t>'avr 아키텍처' 경고가 떠도 무시 — ESP32에서 정상 동작!</a:t>
             </a:r>
             <a:endParaRPr lang="en-US" sz="1450" dirty="0"/>
           </a:p>
@@ -3669,7 +3647,7 @@
                 <a:ea typeface="Pretendard" pitchFamily="34" charset="-122"/>
                 <a:cs typeface="Pretendard" pitchFamily="34" charset="-120"/>
               </a:rPr>
-              <a:t>글자가 안 보이면? ① 뒷면 파란 다이얼(대비) 조절 ② 다른 제품 LCD면 주소 0x27·0x3F</a:t>
+              <a:t>안 나오면? ① 케이블이 신호 2칸에 제대로 꽂혔는지 ② DIO·CLK 번호를 맞바꿔 재업로드</a:t>
             </a:r>
             <a:endParaRPr lang="en-US" sz="1400" dirty="0"/>
           </a:p>
@@ -3740,7 +3718,7 @@
                 <a:ea typeface="Pretendard" pitchFamily="34" charset="-122"/>
                 <a:cs typeface="Pretendard" pitchFamily="34" charset="-120"/>
               </a:rPr>
-              <a:t>미션 ② 환영 메시지 보드</a:t>
+              <a:t>미션 ② 팀 번호 보드</a:t>
             </a:r>
             <a:endParaRPr lang="en-US" sz="2500" dirty="0"/>
           </a:p>
@@ -3937,7 +3915,7 @@
                 <a:ea typeface="Pretendard" pitchFamily="34" charset="-122"/>
                 <a:cs typeface="Pretendard" pitchFamily="34" charset="-120"/>
               </a:rPr>
-              <a:t>전원이 켜지면 LCD 두 줄에 우리 팀 환영 메시지가 뜨고, 동시에 내장 LED가 팀 신호(미션①)로 인사해요</a:t>
+              <a:t>전원이 켜지면 7세그에 우리 팀 번호가 뜨고, 동시에 내장 LED가 팀 신호(미션①)로 인사해요</a:t>
             </a:r>
             <a:endParaRPr lang="en-US" sz="1500" dirty="0"/>
           </a:p>
@@ -4045,7 +4023,7 @@
                 <a:ea typeface="Pretendard" pitchFamily="34" charset="-122"/>
                 <a:cs typeface="Pretendard" pitchFamily="34" charset="-120"/>
               </a:rPr>
-              <a:t>☐  LCD 두 줄을 모두 사용</a:t>
+              <a:t>☐  7세그에 팀 번호 표시</a:t>
             </a:r>
             <a:endParaRPr lang="en-US" sz="1450" dirty="0"/>
           </a:p>
@@ -4065,7 +4043,7 @@
                 <a:ea typeface="Pretendard" pitchFamily="34" charset="-122"/>
                 <a:cs typeface="Pretendard" pitchFamily="34" charset="-120"/>
               </a:rPr>
-              <a:t>☐  LED 팀 신호와 LCD 표시가 함께 동작</a:t>
+              <a:t>☐  LED 팀 신호와 7세그 표시가 함께 동작</a:t>
             </a:r>
             <a:endParaRPr lang="en-US" sz="1450" dirty="0"/>
           </a:p>
@@ -4146,7 +4124,7 @@
                 <a:ea typeface="Pretendard" pitchFamily="34" charset="-122"/>
                 <a:cs typeface="Pretendard" pitchFamily="34" charset="-120"/>
               </a:rPr>
-              <a:t>💡 힌트  영문·숫자 기준 한 줄 16자 — 팀 이름이 길면 두 줄로 나누거나 줄여요. 한글은 기본 LCD에 표시되지 않아요!</a:t>
+              <a:t>💡 힌트  7세그는 숫자 전용(0~9999) — 팀 '이름'은 3회차에 웹페이지로 표시하게 돼요!</a:t>
             </a:r>
             <a:endParaRPr lang="en-US" sz="1400" dirty="0"/>
           </a:p>
@@ -4217,7 +4195,7 @@
                 <a:ea typeface="Pretendard" pitchFamily="34" charset="-122"/>
                 <a:cs typeface="Pretendard" pitchFamily="34" charset="-120"/>
               </a:rPr>
-              <a:t>첫 센서 — 빛센서 값을 LCD에 표시</a:t>
+              <a:t>첫 센서 — 빛센서 값을 7세그에 표시</a:t>
             </a:r>
             <a:endParaRPr lang="en-US" sz="2500" dirty="0"/>
           </a:p>
@@ -4256,7 +4234,7 @@
                 <a:ea typeface="Pretendard" pitchFamily="34" charset="-122"/>
                 <a:cs typeface="Pretendard" pitchFamily="34" charset="-120"/>
               </a:rPr>
-              <a:t>센서 → 숫자 → 화면, 3단 흐름이 IoT의 최소 단위예요</a:t>
+              <a:t>센서 → 숫자 → 표시, 3단 흐름이 IoT의 최소 단위예요</a:t>
             </a:r>
             <a:endParaRPr lang="en-US" sz="1450" dirty="0"/>
           </a:p>
@@ -4549,7 +4527,7 @@
                 <a:ea typeface="Courier New" pitchFamily="34" charset="-122"/>
                 <a:cs typeface="Courier New" pitchFamily="34" charset="-120"/>
               </a:rPr>
-              <a:t>  lcd.clear();</a:t>
+              <a:t>  Serial.println(v);</a:t>
             </a:r>
             <a:endParaRPr lang="en-US" sz="1400" dirty="0"/>
           </a:p>
@@ -4569,7 +4547,7 @@
                 <a:ea typeface="Courier New" pitchFamily="34" charset="-122"/>
                 <a:cs typeface="Courier New" pitchFamily="34" charset="-120"/>
               </a:rPr>
-              <a:t>  lcd.setCursor(0, 0);</a:t>
+              <a:t>  display.showNumberDec(v);</a:t>
             </a:r>
             <a:endParaRPr lang="en-US" sz="1400" dirty="0"/>
           </a:p>
@@ -4589,47 +4567,7 @@
                 <a:ea typeface="Courier New" pitchFamily="34" charset="-122"/>
                 <a:cs typeface="Courier New" pitchFamily="34" charset="-120"/>
               </a:rPr>
-              <a:t>  lcd.print("Light:");</a:t>
-            </a:r>
-            <a:endParaRPr lang="en-US" sz="1400" dirty="0"/>
-          </a:p>
-          <a:p>
-            <a:pPr indent="0" marL="0">
-              <a:lnSpc>
-                <a:spcPts val="1750"/>
-              </a:lnSpc>
-              <a:buNone/>
-            </a:pPr>
-            <a:r>
-              <a:rPr lang="en-US" sz="1400" dirty="0">
-                <a:solidFill>
-                  <a:srgbClr val="D9E9FA"/>
-                </a:solidFill>
-                <a:latin typeface="Courier New" pitchFamily="34" charset="0"/>
-                <a:ea typeface="Courier New" pitchFamily="34" charset="-122"/>
-                <a:cs typeface="Courier New" pitchFamily="34" charset="-120"/>
-              </a:rPr>
-              <a:t>  lcd.print(v);</a:t>
-            </a:r>
-            <a:endParaRPr lang="en-US" sz="1400" dirty="0"/>
-          </a:p>
-          <a:p>
-            <a:pPr indent="0" marL="0">
-              <a:lnSpc>
-                <a:spcPts val="1750"/>
-              </a:lnSpc>
-              <a:buNone/>
-            </a:pPr>
-            <a:r>
-              <a:rPr lang="en-US" sz="1400" dirty="0">
-                <a:solidFill>
-                  <a:srgbClr val="D9E9FA"/>
-                </a:solidFill>
-                <a:latin typeface="Courier New" pitchFamily="34" charset="0"/>
-                <a:ea typeface="Courier New" pitchFamily="34" charset="-122"/>
-                <a:cs typeface="Courier New" pitchFamily="34" charset="-120"/>
-              </a:rPr>
-              <a:t>  delay(500);</a:t>
+              <a:t>  delay(300);</a:t>
             </a:r>
             <a:endParaRPr lang="en-US" sz="1400" dirty="0"/>
           </a:p>
@@ -4795,7 +4733,7 @@
                 <a:ea typeface="Pretendard" pitchFamily="34" charset="-122"/>
                 <a:cs typeface="Pretendard" pitchFamily="34" charset="-120"/>
               </a:rPr>
-              <a:t>읽고(센서), 판단하고(코드), 보여준다(LCD) — 오늘의 완성형!</a:t>
+              <a:t>읽고(센서), 판단하고(코드), 보여준다(7세그) — 오늘의 완성형!</a:t>
             </a:r>
             <a:endParaRPr lang="en-US" sz="1400" dirty="0"/>
           </a:p>
@@ -5063,7 +5001,7 @@
                 <a:ea typeface="Pretendard" pitchFamily="34" charset="-122"/>
                 <a:cs typeface="Pretendard" pitchFamily="34" charset="-120"/>
               </a:rPr>
-              <a:t>LCD에 10부터 0까지 1초씩 줄어드는 숫자 → 0이 되는 순간 'TIME OVER!' + 내장 LED 빠르게 5번 점멸</a:t>
+              <a:t>7세그에 10부터 0까지 1초씩 줄어드는 숫자 → 0이 되는 순간 표시가 깜빡이며 내장 LED 빠르게 5번 점멸</a:t>
             </a:r>
             <a:endParaRPr lang="en-US" sz="1500" dirty="0"/>
           </a:p>
@@ -5171,7 +5109,7 @@
                 <a:ea typeface="Pretendard" pitchFamily="34" charset="-122"/>
                 <a:cs typeface="Pretendard" pitchFamily="34" charset="-120"/>
               </a:rPr>
-              <a:t>☐  LCD 카운트다운 (10 → 0)</a:t>
+              <a:t>☐  7세그 카운트다운 (10 → 0)</a:t>
             </a:r>
             <a:endParaRPr lang="en-US" sz="1450" dirty="0"/>
           </a:p>
@@ -5191,7 +5129,7 @@
                 <a:ea typeface="Pretendard" pitchFamily="34" charset="-122"/>
                 <a:cs typeface="Pretendard" pitchFamily="34" charset="-120"/>
               </a:rPr>
-              <a:t>☐  0에서 'TIME OVER!' 표시와 LED 점멸이 함께 동작</a:t>
+              <a:t>☐  0에서 깜빡임과 LED 점멸이 함께 동작</a:t>
             </a:r>
             <a:endParaRPr lang="en-US" sz="1450" dirty="0"/>
           </a:p>
@@ -5831,7 +5769,7 @@
                 <a:ea typeface="Pretendard" pitchFamily="34" charset="-122"/>
                 <a:cs typeface="Pretendard" pitchFamily="34" charset="-120"/>
               </a:rPr>
-              <a:t>LCD에 아무것도 안 나와요</a:t>
+              <a:t>7세그에 아무것도 안 나와요</a:t>
             </a:r>
             <a:endParaRPr lang="en-US" sz="1450" dirty="0"/>
           </a:p>
@@ -5848,7 +5786,7 @@
                 <a:ea typeface="Pretendard" pitchFamily="34" charset="-122"/>
                 <a:cs typeface="Pretendard" pitchFamily="34" charset="-120"/>
               </a:rPr>
-              <a:t>→ ① 고릴라셀 LCD 주소가 0x20인지 확인 ② 뒷면 파란 다이얼로 대비 조절 ③ I2C 스캐너 코드로 실제 주소 확인</a:t>
+              <a:t>→ ① 케이블이 신호 2칸에 제대로 꽂혔는지 ② DIO·CLK 번호가 꽂은 칸의 GPIO와 맞는지 ③ 두 번호를 맞바꿔 재업로드 ④ TM1637 라이브러리 설치 확인</a:t>
             </a:r>
             <a:endParaRPr lang="en-US" sz="1450" dirty="0"/>
           </a:p>
@@ -6209,7 +6147,7 @@
                 <a:ea typeface="Pretendard" pitchFamily="34" charset="-122"/>
                 <a:cs typeface="Pretendard" pitchFamily="34" charset="-120"/>
               </a:rPr>
-              <a:t>✔  내장 LED와 LCD를 제어하고, 첫 센서(빛)를 읽어 화면에 표시했어요</a:t>
+              <a:t>✔  내장 LED와 7세그먼트를 제어하고, 첫 센서(빛)를 읽어 숫자로 표시했어요</a:t>
             </a:r>
             <a:endParaRPr lang="en-US" sz="1450" dirty="0"/>
           </a:p>
@@ -7185,7 +7123,7 @@
                 <a:ea typeface="Pretendard" pitchFamily="34" charset="-122"/>
                 <a:cs typeface="Pretendard" pitchFamily="34" charset="-120"/>
               </a:rPr>
-              <a:t>내장 LED와 LCD를 제어하고, 첫 센서(빛)의 값을 LCD에 표시하는 미션을 완수해요</a:t>
+              <a:t>내장 LED와 7세그먼트를 제어하고, 첫 센서(빛)의 값을 7세그에 표시하는 미션을 완수해요</a:t>
             </a:r>
             <a:endParaRPr lang="en-US" sz="1450" dirty="0"/>
           </a:p>
@@ -7756,7 +7694,7 @@
                           <a:ea typeface="Pretendard" pitchFamily="34" charset="-122"/>
                           <a:cs typeface="Pretendard" pitchFamily="34" charset="-120"/>
                         </a:rPr>
-                        <a:t>LCD에 글자 표시 · 환영 메시지 미션</a:t>
+                        <a:t>7세그에 숫자 표시 · 팀 번호 보드 미션</a:t>
                       </a:r>
                       <a:endParaRPr lang="en-US" sz="1400" dirty="0">
                         <a:latin typeface="Pretendard" charset="0"/>
@@ -9240,7 +9178,7 @@
                           <a:ea typeface="Pretendard" pitchFamily="34" charset="-122"/>
                           <a:cs typeface="Pretendard" pitchFamily="34" charset="-120"/>
                         </a:rPr>
-                        <a:t>ESP32 첫 만남 — LED·LCD·첫 센서 (오늘)</a:t>
+                        <a:t>ESP32 첫 만남 — LED·7세그·첫 센서 (오늘)</a:t>
                       </a:r>
                       <a:endParaRPr lang="en-US" sz="1400" dirty="0">
                         <a:latin typeface="Pretendard" charset="0"/>
@@ -11159,7 +11097,7 @@
                           <a:ea typeface="Pretendard" pitchFamily="34" charset="-122"/>
                           <a:cs typeface="Pretendard" pitchFamily="34" charset="-120"/>
                         </a:rPr>
-                        <a:t>메뉴 주문 → 주문번호 LCD 표시 → 매출 통계</a:t>
+                        <a:t>메뉴 주문 → 주문번호 7세그 표시 → 매출 통계</a:t>
                       </a:r>
                       <a:endParaRPr lang="en-US" sz="1400" dirty="0">
                         <a:latin typeface="Pretendard" charset="0"/>
@@ -12334,7 +12272,7 @@
                 <a:ea typeface="Pretendard" pitchFamily="34" charset="-122"/>
                 <a:cs typeface="Pretendard" pitchFamily="34" charset="-120"/>
               </a:rPr>
-              <a:t>고릴라 실드(포트판) + 센서 셀 16종 — 오늘은 LCD·빛센서 셀만 사용</a:t>
+              <a:t>고릴라 실드(포트판) + 센서 셀 16종 — 오늘은 7세그·빛센서 셀만 사용</a:t>
             </a:r>
             <a:endParaRPr lang="en-US" sz="1450" dirty="0"/>
           </a:p>
